--- a/presentation.pptx
+++ b/presentation.pptx
@@ -2872,7 +2872,7 @@
         </p:nvSpPr>
         <p:spPr>
           <a:xfrm>
-            <a:off x="822960" y="5989320"/>
+            <a:off x="638338" y="5720471"/>
             <a:ext cx="7315200" cy="365760"/>
           </a:xfrm>
           <a:prstGeom prst="rect">
@@ -2885,21 +2885,106 @@
           <a:bodyPr wrap="square" lIns="0" tIns="0" rIns="0" bIns="0" rtlCol="0" anchor="ctr"/>
           <a:lstStyle/>
           <a:p>
-            <a:pPr marL="0" indent="0">
-              <a:buNone/>
-            </a:pPr>
-            <a:r>
-              <a:rPr lang="ru-RU" sz="1300" dirty="0">
+            <a:r>
+              <a:rPr lang="ru-RU" sz="1500" b="1" dirty="0">
                 <a:solidFill>
                   <a:srgbClr val="CADCFC"/>
                 </a:solidFill>
-                <a:latin typeface="Calibri" pitchFamily="34" charset="0"/>
-                <a:ea typeface="Calibri" pitchFamily="34" charset="-122"/>
-                <a:cs typeface="Calibri" pitchFamily="34" charset="-120"/>
-              </a:rPr>
-              <a:t>Участники: Рубцова Галина, Голубчиков Антон, Григорьев Максим, Самсонов Владимир</a:t>
-            </a:r>
-            <a:endParaRPr lang="en-US" sz="1300" dirty="0"/>
+                <a:latin typeface="Cambria" panose="02040503050406030204" pitchFamily="18" charset="0"/>
+                <a:ea typeface="Cambria" panose="02040503050406030204" pitchFamily="18" charset="0"/>
+              </a:rPr>
+              <a:t>Участники:</a:t>
+            </a:r>
+            <a:r>
+              <a:rPr lang="ru-RU" sz="1500" dirty="0">
+                <a:solidFill>
+                  <a:srgbClr val="CADCFC"/>
+                </a:solidFill>
+                <a:latin typeface="Cambria" panose="02040503050406030204" pitchFamily="18" charset="0"/>
+                <a:ea typeface="Cambria" panose="02040503050406030204" pitchFamily="18" charset="0"/>
+              </a:rPr>
+              <a:t> Рубцова Галина Игоревна (@</a:t>
+            </a:r>
+            <a:r>
+              <a:rPr lang="en-US" sz="1500" dirty="0">
+                <a:solidFill>
+                  <a:srgbClr val="CADCFC"/>
+                </a:solidFill>
+                <a:latin typeface="Cambria" panose="02040503050406030204" pitchFamily="18" charset="0"/>
+                <a:ea typeface="Cambria" panose="02040503050406030204" pitchFamily="18" charset="0"/>
+              </a:rPr>
+              <a:t>DoniZefironi</a:t>
+            </a:r>
+            <a:r>
+              <a:rPr lang="ru-RU" sz="1500" dirty="0">
+                <a:solidFill>
+                  <a:srgbClr val="CADCFC"/>
+                </a:solidFill>
+                <a:latin typeface="Cambria" panose="02040503050406030204" pitchFamily="18" charset="0"/>
+                <a:ea typeface="Cambria" panose="02040503050406030204" pitchFamily="18" charset="0"/>
+              </a:rPr>
+              <a:t>), Голубчиков Антон Сергеевич (@</a:t>
+            </a:r>
+            <a:r>
+              <a:rPr lang="ru-RU" sz="1500" dirty="0" err="1">
+                <a:solidFill>
+                  <a:srgbClr val="CADCFC"/>
+                </a:solidFill>
+                <a:latin typeface="Cambria" panose="02040503050406030204" pitchFamily="18" charset="0"/>
+                <a:ea typeface="Cambria" panose="02040503050406030204" pitchFamily="18" charset="0"/>
+              </a:rPr>
+              <a:t>DataScience_py_official</a:t>
+            </a:r>
+            <a:r>
+              <a:rPr lang="ru-RU" sz="1500" dirty="0">
+                <a:solidFill>
+                  <a:srgbClr val="CADCFC"/>
+                </a:solidFill>
+                <a:latin typeface="Cambria" panose="02040503050406030204" pitchFamily="18" charset="0"/>
+                <a:ea typeface="Cambria" panose="02040503050406030204" pitchFamily="18" charset="0"/>
+              </a:rPr>
+              <a:t>), Григорьев Максим Олегович (@</a:t>
+            </a:r>
+            <a:r>
+              <a:rPr lang="ru-RU" sz="1500" dirty="0" err="1">
+                <a:solidFill>
+                  <a:srgbClr val="CADCFC"/>
+                </a:solidFill>
+                <a:latin typeface="Cambria" panose="02040503050406030204" pitchFamily="18" charset="0"/>
+                <a:ea typeface="Cambria" panose="02040503050406030204" pitchFamily="18" charset="0"/>
+              </a:rPr>
+              <a:t>bzmotmrg</a:t>
+            </a:r>
+            <a:r>
+              <a:rPr lang="ru-RU" sz="1500" dirty="0">
+                <a:solidFill>
+                  <a:srgbClr val="CADCFC"/>
+                </a:solidFill>
+                <a:latin typeface="Cambria" panose="02040503050406030204" pitchFamily="18" charset="0"/>
+                <a:ea typeface="Cambria" panose="02040503050406030204" pitchFamily="18" charset="0"/>
+              </a:rPr>
+              <a:t>), Кочкин Егор Юрьевич (@ko4a_0110), Самсонов Владимир Антонович (@</a:t>
+            </a:r>
+            <a:r>
+              <a:rPr lang="ru-RU" sz="1500" dirty="0" err="1">
+                <a:solidFill>
+                  <a:srgbClr val="CADCFC"/>
+                </a:solidFill>
+                <a:latin typeface="Cambria" panose="02040503050406030204" pitchFamily="18" charset="0"/>
+                <a:ea typeface="Cambria" panose="02040503050406030204" pitchFamily="18" charset="0"/>
+              </a:rPr>
+              <a:t>samsonov_v_mir</a:t>
+            </a:r>
+            <a:r>
+              <a:rPr lang="ru-RU" sz="1500" dirty="0">
+                <a:solidFill>
+                  <a:srgbClr val="CADCFC"/>
+                </a:solidFill>
+                <a:latin typeface="Cambria" panose="02040503050406030204" pitchFamily="18" charset="0"/>
+                <a:ea typeface="Cambria" panose="02040503050406030204" pitchFamily="18" charset="0"/>
+              </a:rPr>
+              <a:t>)</a:t>
+            </a:r>
           </a:p>
         </p:txBody>
       </p:sp>
@@ -3017,6 +3102,68 @@
           <a:chExt cx="0" cy="0"/>
         </a:xfrm>
       </p:grpSpPr>
+      <p:pic>
+        <p:nvPicPr>
+          <p:cNvPr id="22" name="Picture 2" descr="Picture background">
+            <a:extLst>
+              <a:ext uri="{FF2B5EF4-FFF2-40B4-BE49-F238E27FC236}">
+                <a16:creationId xmlns:a16="http://schemas.microsoft.com/office/drawing/2014/main" id="{8C29EC95-6EDE-49CA-8759-B46FBF185D7B}"/>
+              </a:ext>
+            </a:extLst>
+          </p:cNvPr>
+          <p:cNvPicPr>
+            <a:picLocks noChangeAspect="1" noChangeArrowheads="1"/>
+          </p:cNvPicPr>
+          <p:nvPr/>
+        </p:nvPicPr>
+        <p:blipFill>
+          <a:blip r:embed="rId3">
+            <a:extLst>
+              <a:ext uri="{BEBA8EAE-BF5A-486C-A8C5-ECC9F3942E4B}">
+                <a14:imgProps xmlns:a14="http://schemas.microsoft.com/office/drawing/2010/main">
+                  <a14:imgLayer r:embed="rId4">
+                    <a14:imgEffect>
+                      <a14:backgroundRemoval t="10000" b="90000" l="10000" r="90000">
+                        <a14:foregroundMark x1="47667" y1="38444" x2="47667" y2="33667"/>
+                        <a14:foregroundMark x1="49111" y1="38000" x2="46889" y2="35333"/>
+                        <a14:foregroundMark x1="53556" y1="50444" x2="53556" y2="50444"/>
+                        <a14:foregroundMark x1="19111" y1="68222" x2="19111" y2="68222"/>
+                        <a14:foregroundMark x1="51889" y1="26778" x2="51889" y2="26778"/>
+                      </a14:backgroundRemoval>
+                    </a14:imgEffect>
+                  </a14:imgLayer>
+                </a14:imgProps>
+              </a:ext>
+              <a:ext uri="{28A0092B-C50C-407E-A947-70E740481C1C}">
+                <a14:useLocalDpi xmlns:a14="http://schemas.microsoft.com/office/drawing/2010/main" val="0"/>
+              </a:ext>
+            </a:extLst>
+          </a:blip>
+          <a:srcRect/>
+          <a:stretch>
+            <a:fillRect/>
+          </a:stretch>
+        </p:blipFill>
+        <p:spPr bwMode="auto">
+          <a:xfrm>
+            <a:off x="7914054" y="1147591"/>
+            <a:ext cx="4562817" cy="4562817"/>
+          </a:xfrm>
+          <a:prstGeom prst="rect">
+            <a:avLst/>
+          </a:prstGeom>
+          <a:noFill/>
+          <a:extLst>
+            <a:ext uri="{909E8E84-426E-40DD-AFC4-6F175D3DCCD1}">
+              <a14:hiddenFill xmlns:a14="http://schemas.microsoft.com/office/drawing/2010/main">
+                <a:solidFill>
+                  <a:srgbClr val="FFFFFF"/>
+                </a:solidFill>
+              </a14:hiddenFill>
+            </a:ext>
+          </a:extLst>
+        </p:spPr>
+      </p:pic>
       <p:sp>
         <p:nvSpPr>
           <p:cNvPr id="2" name="Text 0"/>
@@ -3741,6 +3888,68 @@
           <a:chExt cx="0" cy="0"/>
         </a:xfrm>
       </p:grpSpPr>
+      <p:pic>
+        <p:nvPicPr>
+          <p:cNvPr id="27" name="Picture 2" descr="Picture background">
+            <a:extLst>
+              <a:ext uri="{FF2B5EF4-FFF2-40B4-BE49-F238E27FC236}">
+                <a16:creationId xmlns:a16="http://schemas.microsoft.com/office/drawing/2014/main" id="{783DB6CB-B302-4577-821D-FEC041A8E665}"/>
+              </a:ext>
+            </a:extLst>
+          </p:cNvPr>
+          <p:cNvPicPr>
+            <a:picLocks noChangeAspect="1" noChangeArrowheads="1"/>
+          </p:cNvPicPr>
+          <p:nvPr/>
+        </p:nvPicPr>
+        <p:blipFill>
+          <a:blip r:embed="rId3">
+            <a:extLst>
+              <a:ext uri="{BEBA8EAE-BF5A-486C-A8C5-ECC9F3942E4B}">
+                <a14:imgProps xmlns:a14="http://schemas.microsoft.com/office/drawing/2010/main">
+                  <a14:imgLayer r:embed="rId4">
+                    <a14:imgEffect>
+                      <a14:backgroundRemoval t="10000" b="90000" l="10000" r="90000">
+                        <a14:foregroundMark x1="47667" y1="38444" x2="47667" y2="33667"/>
+                        <a14:foregroundMark x1="49111" y1="38000" x2="46889" y2="35333"/>
+                        <a14:foregroundMark x1="53556" y1="50444" x2="53556" y2="50444"/>
+                        <a14:foregroundMark x1="19111" y1="68222" x2="19111" y2="68222"/>
+                        <a14:foregroundMark x1="51889" y1="26778" x2="51889" y2="26778"/>
+                      </a14:backgroundRemoval>
+                    </a14:imgEffect>
+                  </a14:imgLayer>
+                </a14:imgProps>
+              </a:ext>
+              <a:ext uri="{28A0092B-C50C-407E-A947-70E740481C1C}">
+                <a14:useLocalDpi xmlns:a14="http://schemas.microsoft.com/office/drawing/2010/main" val="0"/>
+              </a:ext>
+            </a:extLst>
+          </a:blip>
+          <a:srcRect/>
+          <a:stretch>
+            <a:fillRect/>
+          </a:stretch>
+        </p:blipFill>
+        <p:spPr bwMode="auto">
+          <a:xfrm>
+            <a:off x="9052241" y="-375064"/>
+            <a:ext cx="2853247" cy="2853247"/>
+          </a:xfrm>
+          <a:prstGeom prst="rect">
+            <a:avLst/>
+          </a:prstGeom>
+          <a:noFill/>
+          <a:extLst>
+            <a:ext uri="{909E8E84-426E-40DD-AFC4-6F175D3DCCD1}">
+              <a14:hiddenFill xmlns:a14="http://schemas.microsoft.com/office/drawing/2010/main">
+                <a:solidFill>
+                  <a:srgbClr val="FFFFFF"/>
+                </a:solidFill>
+              </a14:hiddenFill>
+            </a:ext>
+          </a:extLst>
+        </p:spPr>
+      </p:pic>
       <p:sp>
         <p:nvSpPr>
           <p:cNvPr id="2" name="Text 0"/>
@@ -5176,6 +5385,68 @@
           <a:chExt cx="0" cy="0"/>
         </a:xfrm>
       </p:grpSpPr>
+      <p:pic>
+        <p:nvPicPr>
+          <p:cNvPr id="21" name="Picture 2" descr="Picture background">
+            <a:extLst>
+              <a:ext uri="{FF2B5EF4-FFF2-40B4-BE49-F238E27FC236}">
+                <a16:creationId xmlns:a16="http://schemas.microsoft.com/office/drawing/2014/main" id="{B49E9534-A9FB-4D25-BBA1-96883D93761F}"/>
+              </a:ext>
+            </a:extLst>
+          </p:cNvPr>
+          <p:cNvPicPr>
+            <a:picLocks noChangeAspect="1" noChangeArrowheads="1"/>
+          </p:cNvPicPr>
+          <p:nvPr/>
+        </p:nvPicPr>
+        <p:blipFill>
+          <a:blip r:embed="rId3">
+            <a:extLst>
+              <a:ext uri="{BEBA8EAE-BF5A-486C-A8C5-ECC9F3942E4B}">
+                <a14:imgProps xmlns:a14="http://schemas.microsoft.com/office/drawing/2010/main">
+                  <a14:imgLayer r:embed="rId4">
+                    <a14:imgEffect>
+                      <a14:backgroundRemoval t="10000" b="90000" l="10000" r="90000">
+                        <a14:foregroundMark x1="47667" y1="38444" x2="47667" y2="33667"/>
+                        <a14:foregroundMark x1="49111" y1="38000" x2="46889" y2="35333"/>
+                        <a14:foregroundMark x1="53556" y1="50444" x2="53556" y2="50444"/>
+                        <a14:foregroundMark x1="19111" y1="68222" x2="19111" y2="68222"/>
+                        <a14:foregroundMark x1="51889" y1="26778" x2="51889" y2="26778"/>
+                      </a14:backgroundRemoval>
+                    </a14:imgEffect>
+                  </a14:imgLayer>
+                </a14:imgProps>
+              </a:ext>
+              <a:ext uri="{28A0092B-C50C-407E-A947-70E740481C1C}">
+                <a14:useLocalDpi xmlns:a14="http://schemas.microsoft.com/office/drawing/2010/main" val="0"/>
+              </a:ext>
+            </a:extLst>
+          </a:blip>
+          <a:srcRect/>
+          <a:stretch>
+            <a:fillRect/>
+          </a:stretch>
+        </p:blipFill>
+        <p:spPr bwMode="auto">
+          <a:xfrm>
+            <a:off x="10051383" y="-554976"/>
+            <a:ext cx="2300034" cy="2300034"/>
+          </a:xfrm>
+          <a:prstGeom prst="rect">
+            <a:avLst/>
+          </a:prstGeom>
+          <a:noFill/>
+          <a:extLst>
+            <a:ext uri="{909E8E84-426E-40DD-AFC4-6F175D3DCCD1}">
+              <a14:hiddenFill xmlns:a14="http://schemas.microsoft.com/office/drawing/2010/main">
+                <a:solidFill>
+                  <a:srgbClr val="FFFFFF"/>
+                </a:solidFill>
+              </a14:hiddenFill>
+            </a:ext>
+          </a:extLst>
+        </p:spPr>
+      </p:pic>
       <p:sp>
         <p:nvSpPr>
           <p:cNvPr id="2" name="Text 0"/>
@@ -5685,7 +5956,7 @@
         </p:xfrm>
         <a:graphic>
           <a:graphicData uri="http://schemas.openxmlformats.org/drawingml/2006/chart">
-            <c:chart xmlns:c="http://schemas.openxmlformats.org/drawingml/2006/chart" xmlns:r="http://schemas.openxmlformats.org/officeDocument/2006/relationships" r:id="rId3"/>
+            <c:chart xmlns:c="http://schemas.openxmlformats.org/drawingml/2006/chart" xmlns:r="http://schemas.openxmlformats.org/officeDocument/2006/relationships" r:id="rId5"/>
           </a:graphicData>
         </a:graphic>
       </p:graphicFrame>
@@ -6217,7 +6488,7 @@
               <a:buNone/>
             </a:pPr>
             <a:r>
-              <a:rPr lang="en-US" sz="1050" b="1" dirty="0">
+              <a:rPr lang="en-US" sz="1200" b="1" dirty="0">
                 <a:solidFill>
                   <a:srgbClr val="3A8B5C"/>
                 </a:solidFill>
@@ -6227,7 +6498,7 @@
               </a:rPr>
               <a:t>Очень высокая</a:t>
             </a:r>
-            <a:endParaRPr lang="en-US" sz="1050" dirty="0"/>
+            <a:endParaRPr lang="en-US" sz="1200" dirty="0"/>
           </a:p>
         </p:txBody>
       </p:sp>
@@ -6256,7 +6527,7 @@
               <a:buNone/>
             </a:pPr>
             <a:r>
-              <a:rPr lang="en-US" sz="1050" dirty="0">
+              <a:rPr lang="en-US" sz="1200" dirty="0">
                 <a:solidFill>
                   <a:srgbClr val="5C6478"/>
                 </a:solidFill>
@@ -6266,7 +6537,7 @@
               </a:rPr>
               <a:t>88% пакетов окна — с курсом «Алгоритмы» (против 31% вне окна)</a:t>
             </a:r>
-            <a:endParaRPr lang="en-US" sz="1050" dirty="0"/>
+            <a:endParaRPr lang="en-US" sz="1200" dirty="0"/>
           </a:p>
         </p:txBody>
       </p:sp>
@@ -6420,7 +6691,7 @@
               <a:buNone/>
             </a:pPr>
             <a:r>
-              <a:rPr lang="en-US" sz="1050" b="1" dirty="0">
+              <a:rPr lang="en-US" sz="1200" b="1" dirty="0">
                 <a:solidFill>
                   <a:srgbClr val="3A8B5C"/>
                 </a:solidFill>
@@ -6430,7 +6701,7 @@
               </a:rPr>
               <a:t>Высокая</a:t>
             </a:r>
-            <a:endParaRPr lang="en-US" sz="1050" dirty="0"/>
+            <a:endParaRPr lang="en-US" sz="1200" dirty="0"/>
           </a:p>
         </p:txBody>
       </p:sp>
@@ -6459,7 +6730,7 @@
               <a:buNone/>
             </a:pPr>
             <a:r>
-              <a:rPr lang="en-US" sz="1050" dirty="0">
+              <a:rPr lang="en-US" sz="1200" dirty="0">
                 <a:solidFill>
                   <a:srgbClr val="5C6478"/>
                 </a:solidFill>
@@ -6469,7 +6740,7 @@
               </a:rPr>
               <a:t>Продажи ПРО: 0,8 → 10,5 заказов/день, рост в 13 раз</a:t>
             </a:r>
-            <a:endParaRPr lang="en-US" sz="1050" dirty="0"/>
+            <a:endParaRPr lang="en-US" sz="1200" dirty="0"/>
           </a:p>
         </p:txBody>
       </p:sp>
@@ -6623,7 +6894,7 @@
               <a:buNone/>
             </a:pPr>
             <a:r>
-              <a:rPr lang="en-US" sz="1050" b="1" dirty="0">
+              <a:rPr lang="en-US" sz="1200" b="1" dirty="0">
                 <a:solidFill>
                   <a:srgbClr val="3A8B5C"/>
                 </a:solidFill>
@@ -6633,7 +6904,7 @@
               </a:rPr>
               <a:t>Очень высокая</a:t>
             </a:r>
-            <a:endParaRPr lang="en-US" sz="1050" dirty="0"/>
+            <a:endParaRPr lang="en-US" sz="1200" dirty="0"/>
           </a:p>
         </p:txBody>
       </p:sp>
@@ -6662,7 +6933,7 @@
               <a:buNone/>
             </a:pPr>
             <a:r>
-              <a:rPr lang="en-US" sz="1050" dirty="0">
+              <a:rPr lang="en-US" sz="1200" dirty="0">
                 <a:solidFill>
                   <a:srgbClr val="5C6478"/>
                 </a:solidFill>
@@ -6672,7 +6943,7 @@
               </a:rPr>
               <a:t>49 и 45 заказов 4–5 сентября, 8 950 ₽ — доминирующая цена</a:t>
             </a:r>
-            <a:endParaRPr lang="en-US" sz="1050" dirty="0"/>
+            <a:endParaRPr lang="en-US" sz="1200" dirty="0"/>
           </a:p>
         </p:txBody>
       </p:sp>
@@ -6826,7 +7097,7 @@
               <a:buNone/>
             </a:pPr>
             <a:r>
-              <a:rPr lang="en-US" sz="1050" b="1" dirty="0">
+              <a:rPr lang="en-US" sz="1200" b="1" dirty="0">
                 <a:solidFill>
                   <a:srgbClr val="F2A93B"/>
                 </a:solidFill>
@@ -6836,7 +7107,7 @@
               </a:rPr>
               <a:t>Средняя</a:t>
             </a:r>
-            <a:endParaRPr lang="en-US" sz="1050" dirty="0"/>
+            <a:endParaRPr lang="en-US" sz="1200" dirty="0"/>
           </a:p>
         </p:txBody>
       </p:sp>
@@ -6865,7 +7136,7 @@
               <a:buNone/>
             </a:pPr>
             <a:r>
-              <a:rPr lang="en-US" sz="1050" dirty="0">
+              <a:rPr lang="en-US" sz="1200" dirty="0">
                 <a:solidFill>
                   <a:srgbClr val="5C6478"/>
                 </a:solidFill>
@@ -6875,7 +7146,7 @@
               </a:rPr>
               <a:t>Формирует новую воронку, прямой связи с продажами не видно</a:t>
             </a:r>
-            <a:endParaRPr lang="en-US" sz="1050" dirty="0"/>
+            <a:endParaRPr lang="en-US" sz="1200" dirty="0"/>
           </a:p>
         </p:txBody>
       </p:sp>
@@ -6918,6 +7189,68 @@
           </a:p>
         </p:txBody>
       </p:sp>
+      <p:pic>
+        <p:nvPicPr>
+          <p:cNvPr id="30" name="Picture 2" descr="Picture background">
+            <a:extLst>
+              <a:ext uri="{FF2B5EF4-FFF2-40B4-BE49-F238E27FC236}">
+                <a16:creationId xmlns:a16="http://schemas.microsoft.com/office/drawing/2014/main" id="{5E85C79C-1E72-4CE6-95B2-A370E274F278}"/>
+              </a:ext>
+            </a:extLst>
+          </p:cNvPr>
+          <p:cNvPicPr>
+            <a:picLocks noChangeAspect="1" noChangeArrowheads="1"/>
+          </p:cNvPicPr>
+          <p:nvPr/>
+        </p:nvPicPr>
+        <p:blipFill>
+          <a:blip r:embed="rId3">
+            <a:extLst>
+              <a:ext uri="{BEBA8EAE-BF5A-486C-A8C5-ECC9F3942E4B}">
+                <a14:imgProps xmlns:a14="http://schemas.microsoft.com/office/drawing/2010/main">
+                  <a14:imgLayer r:embed="rId4">
+                    <a14:imgEffect>
+                      <a14:backgroundRemoval t="10000" b="90000" l="10000" r="90000">
+                        <a14:foregroundMark x1="47667" y1="38444" x2="47667" y2="33667"/>
+                        <a14:foregroundMark x1="49111" y1="38000" x2="46889" y2="35333"/>
+                        <a14:foregroundMark x1="53556" y1="50444" x2="53556" y2="50444"/>
+                        <a14:foregroundMark x1="19111" y1="68222" x2="19111" y2="68222"/>
+                        <a14:foregroundMark x1="51889" y1="26778" x2="51889" y2="26778"/>
+                      </a14:backgroundRemoval>
+                    </a14:imgEffect>
+                  </a14:imgLayer>
+                </a14:imgProps>
+              </a:ext>
+              <a:ext uri="{28A0092B-C50C-407E-A947-70E740481C1C}">
+                <a14:useLocalDpi xmlns:a14="http://schemas.microsoft.com/office/drawing/2010/main" val="0"/>
+              </a:ext>
+            </a:extLst>
+          </a:blip>
+          <a:srcRect/>
+          <a:stretch>
+            <a:fillRect/>
+          </a:stretch>
+        </p:blipFill>
+        <p:spPr bwMode="auto">
+          <a:xfrm>
+            <a:off x="-45329" y="4242656"/>
+            <a:ext cx="2853247" cy="2853247"/>
+          </a:xfrm>
+          <a:prstGeom prst="rect">
+            <a:avLst/>
+          </a:prstGeom>
+          <a:noFill/>
+          <a:extLst>
+            <a:ext uri="{909E8E84-426E-40DD-AFC4-6F175D3DCCD1}">
+              <a14:hiddenFill xmlns:a14="http://schemas.microsoft.com/office/drawing/2010/main">
+                <a:solidFill>
+                  <a:srgbClr val="FFFFFF"/>
+                </a:solidFill>
+              </a14:hiddenFill>
+            </a:ext>
+          </a:extLst>
+        </p:spPr>
+      </p:pic>
     </p:spTree>
   </p:cSld>
   <p:clrMapOvr>
@@ -7838,6 +8171,68 @@
           </a:p>
         </p:txBody>
       </p:sp>
+      <p:pic>
+        <p:nvPicPr>
+          <p:cNvPr id="26" name="Picture 2" descr="Picture background">
+            <a:extLst>
+              <a:ext uri="{FF2B5EF4-FFF2-40B4-BE49-F238E27FC236}">
+                <a16:creationId xmlns:a16="http://schemas.microsoft.com/office/drawing/2014/main" id="{01E8F814-95F4-47E0-80E0-EF7DAD046483}"/>
+              </a:ext>
+            </a:extLst>
+          </p:cNvPr>
+          <p:cNvPicPr>
+            <a:picLocks noChangeAspect="1" noChangeArrowheads="1"/>
+          </p:cNvPicPr>
+          <p:nvPr/>
+        </p:nvPicPr>
+        <p:blipFill>
+          <a:blip r:embed="rId3">
+            <a:extLst>
+              <a:ext uri="{BEBA8EAE-BF5A-486C-A8C5-ECC9F3942E4B}">
+                <a14:imgProps xmlns:a14="http://schemas.microsoft.com/office/drawing/2010/main">
+                  <a14:imgLayer r:embed="rId4">
+                    <a14:imgEffect>
+                      <a14:backgroundRemoval t="10000" b="90000" l="10000" r="90000">
+                        <a14:foregroundMark x1="47667" y1="38444" x2="47667" y2="33667"/>
+                        <a14:foregroundMark x1="49111" y1="38000" x2="46889" y2="35333"/>
+                        <a14:foregroundMark x1="53556" y1="50444" x2="53556" y2="50444"/>
+                        <a14:foregroundMark x1="19111" y1="68222" x2="19111" y2="68222"/>
+                        <a14:foregroundMark x1="51889" y1="26778" x2="51889" y2="26778"/>
+                      </a14:backgroundRemoval>
+                    </a14:imgEffect>
+                  </a14:imgLayer>
+                </a14:imgProps>
+              </a:ext>
+              <a:ext uri="{28A0092B-C50C-407E-A947-70E740481C1C}">
+                <a14:useLocalDpi xmlns:a14="http://schemas.microsoft.com/office/drawing/2010/main" val="0"/>
+              </a:ext>
+            </a:extLst>
+          </a:blip>
+          <a:srcRect/>
+          <a:stretch>
+            <a:fillRect/>
+          </a:stretch>
+        </p:blipFill>
+        <p:spPr bwMode="auto">
+          <a:xfrm>
+            <a:off x="9893808" y="-226413"/>
+            <a:ext cx="2250365" cy="2250365"/>
+          </a:xfrm>
+          <a:prstGeom prst="rect">
+            <a:avLst/>
+          </a:prstGeom>
+          <a:noFill/>
+          <a:extLst>
+            <a:ext uri="{909E8E84-426E-40DD-AFC4-6F175D3DCCD1}">
+              <a14:hiddenFill xmlns:a14="http://schemas.microsoft.com/office/drawing/2010/main">
+                <a:solidFill>
+                  <a:srgbClr val="FFFFFF"/>
+                </a:solidFill>
+              </a14:hiddenFill>
+            </a:ext>
+          </a:extLst>
+        </p:spPr>
+      </p:pic>
     </p:spTree>
   </p:cSld>
   <p:clrMapOvr>
@@ -7873,6 +8268,68 @@
           <a:chExt cx="0" cy="0"/>
         </a:xfrm>
       </p:grpSpPr>
+      <p:pic>
+        <p:nvPicPr>
+          <p:cNvPr id="24" name="Picture 2" descr="Picture background">
+            <a:extLst>
+              <a:ext uri="{FF2B5EF4-FFF2-40B4-BE49-F238E27FC236}">
+                <a16:creationId xmlns:a16="http://schemas.microsoft.com/office/drawing/2014/main" id="{9D6100D7-7B48-45BF-9C81-BA65E871521B}"/>
+              </a:ext>
+            </a:extLst>
+          </p:cNvPr>
+          <p:cNvPicPr>
+            <a:picLocks noChangeAspect="1" noChangeArrowheads="1"/>
+          </p:cNvPicPr>
+          <p:nvPr/>
+        </p:nvPicPr>
+        <p:blipFill>
+          <a:blip r:embed="rId3">
+            <a:extLst>
+              <a:ext uri="{BEBA8EAE-BF5A-486C-A8C5-ECC9F3942E4B}">
+                <a14:imgProps xmlns:a14="http://schemas.microsoft.com/office/drawing/2010/main">
+                  <a14:imgLayer r:embed="rId4">
+                    <a14:imgEffect>
+                      <a14:backgroundRemoval t="10000" b="90000" l="10000" r="90000">
+                        <a14:foregroundMark x1="47667" y1="38444" x2="47667" y2="33667"/>
+                        <a14:foregroundMark x1="49111" y1="38000" x2="46889" y2="35333"/>
+                        <a14:foregroundMark x1="53556" y1="50444" x2="53556" y2="50444"/>
+                        <a14:foregroundMark x1="19111" y1="68222" x2="19111" y2="68222"/>
+                        <a14:foregroundMark x1="51889" y1="26778" x2="51889" y2="26778"/>
+                      </a14:backgroundRemoval>
+                    </a14:imgEffect>
+                  </a14:imgLayer>
+                </a14:imgProps>
+              </a:ext>
+              <a:ext uri="{28A0092B-C50C-407E-A947-70E740481C1C}">
+                <a14:useLocalDpi xmlns:a14="http://schemas.microsoft.com/office/drawing/2010/main" val="0"/>
+              </a:ext>
+            </a:extLst>
+          </a:blip>
+          <a:srcRect/>
+          <a:stretch>
+            <a:fillRect/>
+          </a:stretch>
+        </p:blipFill>
+        <p:spPr bwMode="auto">
+          <a:xfrm>
+            <a:off x="104215" y="4343400"/>
+            <a:ext cx="2250365" cy="2250365"/>
+          </a:xfrm>
+          <a:prstGeom prst="rect">
+            <a:avLst/>
+          </a:prstGeom>
+          <a:noFill/>
+          <a:extLst>
+            <a:ext uri="{909E8E84-426E-40DD-AFC4-6F175D3DCCD1}">
+              <a14:hiddenFill xmlns:a14="http://schemas.microsoft.com/office/drawing/2010/main">
+                <a:solidFill>
+                  <a:srgbClr val="FFFFFF"/>
+                </a:solidFill>
+              </a14:hiddenFill>
+            </a:ext>
+          </a:extLst>
+        </p:spPr>
+      </p:pic>
       <p:sp>
         <p:nvSpPr>
           <p:cNvPr id="2" name="Text 0"/>
@@ -8479,7 +8936,7 @@
         </p:xfrm>
         <a:graphic>
           <a:graphicData uri="http://schemas.openxmlformats.org/drawingml/2006/chart">
-            <c:chart xmlns:c="http://schemas.openxmlformats.org/drawingml/2006/chart" xmlns:r="http://schemas.openxmlformats.org/officeDocument/2006/relationships" r:id="rId3"/>
+            <c:chart xmlns:c="http://schemas.openxmlformats.org/drawingml/2006/chart" xmlns:r="http://schemas.openxmlformats.org/officeDocument/2006/relationships" r:id="rId5"/>
           </a:graphicData>
         </a:graphic>
       </p:graphicFrame>
@@ -9030,6 +9487,68 @@
           </a:p>
         </p:txBody>
       </p:sp>
+      <p:pic>
+        <p:nvPicPr>
+          <p:cNvPr id="11" name="Picture 2" descr="Picture background">
+            <a:extLst>
+              <a:ext uri="{FF2B5EF4-FFF2-40B4-BE49-F238E27FC236}">
+                <a16:creationId xmlns:a16="http://schemas.microsoft.com/office/drawing/2014/main" id="{71722DEA-EA0F-433A-95A4-F4490978CE9A}"/>
+              </a:ext>
+            </a:extLst>
+          </p:cNvPr>
+          <p:cNvPicPr>
+            <a:picLocks noChangeAspect="1" noChangeArrowheads="1"/>
+          </p:cNvPicPr>
+          <p:nvPr/>
+        </p:nvPicPr>
+        <p:blipFill>
+          <a:blip r:embed="rId4">
+            <a:extLst>
+              <a:ext uri="{BEBA8EAE-BF5A-486C-A8C5-ECC9F3942E4B}">
+                <a14:imgProps xmlns:a14="http://schemas.microsoft.com/office/drawing/2010/main">
+                  <a14:imgLayer r:embed="rId5">
+                    <a14:imgEffect>
+                      <a14:backgroundRemoval t="10000" b="90000" l="10000" r="90000">
+                        <a14:foregroundMark x1="47667" y1="38444" x2="47667" y2="33667"/>
+                        <a14:foregroundMark x1="49111" y1="38000" x2="46889" y2="35333"/>
+                        <a14:foregroundMark x1="53556" y1="50444" x2="53556" y2="50444"/>
+                        <a14:foregroundMark x1="19111" y1="68222" x2="19111" y2="68222"/>
+                        <a14:foregroundMark x1="51889" y1="26778" x2="51889" y2="26778"/>
+                      </a14:backgroundRemoval>
+                    </a14:imgEffect>
+                  </a14:imgLayer>
+                </a14:imgProps>
+              </a:ext>
+              <a:ext uri="{28A0092B-C50C-407E-A947-70E740481C1C}">
+                <a14:useLocalDpi xmlns:a14="http://schemas.microsoft.com/office/drawing/2010/main" val="0"/>
+              </a:ext>
+            </a:extLst>
+          </a:blip>
+          <a:srcRect/>
+          <a:stretch>
+            <a:fillRect/>
+          </a:stretch>
+        </p:blipFill>
+        <p:spPr bwMode="auto">
+          <a:xfrm>
+            <a:off x="424646" y="5019115"/>
+            <a:ext cx="1838885" cy="1838885"/>
+          </a:xfrm>
+          <a:prstGeom prst="rect">
+            <a:avLst/>
+          </a:prstGeom>
+          <a:noFill/>
+          <a:extLst>
+            <a:ext uri="{909E8E84-426E-40DD-AFC4-6F175D3DCCD1}">
+              <a14:hiddenFill xmlns:a14="http://schemas.microsoft.com/office/drawing/2010/main">
+                <a:solidFill>
+                  <a:srgbClr val="FFFFFF"/>
+                </a:solidFill>
+              </a14:hiddenFill>
+            </a:ext>
+          </a:extLst>
+        </p:spPr>
+      </p:pic>
     </p:spTree>
   </p:cSld>
   <p:clrMapOvr>
@@ -9237,7 +9756,7 @@
               <a:buNone/>
             </a:pPr>
             <a:r>
-              <a:rPr lang="en-US" sz="1100" b="1" dirty="0">
+              <a:rPr lang="en-US" sz="1200" b="1" dirty="0">
                 <a:solidFill>
                   <a:srgbClr val="5C6478"/>
                 </a:solidFill>
@@ -9247,7 +9766,7 @@
               </a:rPr>
               <a:t>модель атрибуции</a:t>
             </a:r>
-            <a:endParaRPr lang="en-US" sz="1100" dirty="0"/>
+            <a:endParaRPr lang="en-US" sz="1200" dirty="0"/>
           </a:p>
         </p:txBody>
       </p:sp>
@@ -9382,7 +9901,7 @@
               <a:buNone/>
             </a:pPr>
             <a:r>
-              <a:rPr lang="en-US" sz="1100" b="1" dirty="0">
+              <a:rPr lang="en-US" sz="1200" b="1" dirty="0">
                 <a:solidFill>
                   <a:srgbClr val="5C6478"/>
                 </a:solidFill>
@@ -9392,7 +9911,7 @@
               </a:rPr>
               <a:t>holdout-тест</a:t>
             </a:r>
-            <a:endParaRPr lang="en-US" sz="1100" dirty="0"/>
+            <a:endParaRPr lang="en-US" sz="1200" dirty="0"/>
           </a:p>
         </p:txBody>
       </p:sp>
@@ -9727,6 +10246,68 @@
           </a:p>
         </p:txBody>
       </p:sp>
+      <p:pic>
+        <p:nvPicPr>
+          <p:cNvPr id="18" name="Picture 2" descr="Picture background">
+            <a:extLst>
+              <a:ext uri="{FF2B5EF4-FFF2-40B4-BE49-F238E27FC236}">
+                <a16:creationId xmlns:a16="http://schemas.microsoft.com/office/drawing/2014/main" id="{AB0B8535-84D1-45BC-BFA3-5604C2F97BCE}"/>
+              </a:ext>
+            </a:extLst>
+          </p:cNvPr>
+          <p:cNvPicPr>
+            <a:picLocks noChangeAspect="1" noChangeArrowheads="1"/>
+          </p:cNvPicPr>
+          <p:nvPr/>
+        </p:nvPicPr>
+        <p:blipFill>
+          <a:blip r:embed="rId3">
+            <a:extLst>
+              <a:ext uri="{BEBA8EAE-BF5A-486C-A8C5-ECC9F3942E4B}">
+                <a14:imgProps xmlns:a14="http://schemas.microsoft.com/office/drawing/2010/main">
+                  <a14:imgLayer r:embed="rId4">
+                    <a14:imgEffect>
+                      <a14:backgroundRemoval t="10000" b="90000" l="10000" r="90000">
+                        <a14:foregroundMark x1="47667" y1="38444" x2="47667" y2="33667"/>
+                        <a14:foregroundMark x1="49111" y1="38000" x2="46889" y2="35333"/>
+                        <a14:foregroundMark x1="53556" y1="50444" x2="53556" y2="50444"/>
+                        <a14:foregroundMark x1="19111" y1="68222" x2="19111" y2="68222"/>
+                        <a14:foregroundMark x1="51889" y1="26778" x2="51889" y2="26778"/>
+                      </a14:backgroundRemoval>
+                    </a14:imgEffect>
+                  </a14:imgLayer>
+                </a14:imgProps>
+              </a:ext>
+              <a:ext uri="{28A0092B-C50C-407E-A947-70E740481C1C}">
+                <a14:useLocalDpi xmlns:a14="http://schemas.microsoft.com/office/drawing/2010/main" val="0"/>
+              </a:ext>
+            </a:extLst>
+          </a:blip>
+          <a:srcRect/>
+          <a:stretch>
+            <a:fillRect/>
+          </a:stretch>
+        </p:blipFill>
+        <p:spPr bwMode="auto">
+          <a:xfrm>
+            <a:off x="8869680" y="-160020"/>
+            <a:ext cx="1645920" cy="1645920"/>
+          </a:xfrm>
+          <a:prstGeom prst="rect">
+            <a:avLst/>
+          </a:prstGeom>
+          <a:noFill/>
+          <a:extLst>
+            <a:ext uri="{909E8E84-426E-40DD-AFC4-6F175D3DCCD1}">
+              <a14:hiddenFill xmlns:a14="http://schemas.microsoft.com/office/drawing/2010/main">
+                <a:solidFill>
+                  <a:srgbClr val="FFFFFF"/>
+                </a:solidFill>
+              </a14:hiddenFill>
+            </a:ext>
+          </a:extLst>
+        </p:spPr>
+      </p:pic>
     </p:spTree>
   </p:cSld>
   <p:clrMapOvr>
@@ -9762,6 +10343,68 @@
           <a:chExt cx="0" cy="0"/>
         </a:xfrm>
       </p:grpSpPr>
+      <p:pic>
+        <p:nvPicPr>
+          <p:cNvPr id="26" name="Picture 2" descr="Picture background">
+            <a:extLst>
+              <a:ext uri="{FF2B5EF4-FFF2-40B4-BE49-F238E27FC236}">
+                <a16:creationId xmlns:a16="http://schemas.microsoft.com/office/drawing/2014/main" id="{2452EF54-8261-4D66-A6A4-8839692B951E}"/>
+              </a:ext>
+            </a:extLst>
+          </p:cNvPr>
+          <p:cNvPicPr>
+            <a:picLocks noChangeAspect="1" noChangeArrowheads="1"/>
+          </p:cNvPicPr>
+          <p:nvPr/>
+        </p:nvPicPr>
+        <p:blipFill>
+          <a:blip r:embed="rId3">
+            <a:extLst>
+              <a:ext uri="{BEBA8EAE-BF5A-486C-A8C5-ECC9F3942E4B}">
+                <a14:imgProps xmlns:a14="http://schemas.microsoft.com/office/drawing/2010/main">
+                  <a14:imgLayer r:embed="rId4">
+                    <a14:imgEffect>
+                      <a14:backgroundRemoval t="10000" b="90000" l="10000" r="90000">
+                        <a14:foregroundMark x1="47667" y1="38444" x2="47667" y2="33667"/>
+                        <a14:foregroundMark x1="49111" y1="38000" x2="46889" y2="35333"/>
+                        <a14:foregroundMark x1="53556" y1="50444" x2="53556" y2="50444"/>
+                        <a14:foregroundMark x1="19111" y1="68222" x2="19111" y2="68222"/>
+                        <a14:foregroundMark x1="51889" y1="26778" x2="51889" y2="26778"/>
+                      </a14:backgroundRemoval>
+                    </a14:imgEffect>
+                  </a14:imgLayer>
+                </a14:imgProps>
+              </a:ext>
+              <a:ext uri="{28A0092B-C50C-407E-A947-70E740481C1C}">
+                <a14:useLocalDpi xmlns:a14="http://schemas.microsoft.com/office/drawing/2010/main" val="0"/>
+              </a:ext>
+            </a:extLst>
+          </a:blip>
+          <a:srcRect/>
+          <a:stretch>
+            <a:fillRect/>
+          </a:stretch>
+        </p:blipFill>
+        <p:spPr bwMode="auto">
+          <a:xfrm>
+            <a:off x="3465576" y="4507992"/>
+            <a:ext cx="2350008" cy="2350008"/>
+          </a:xfrm>
+          <a:prstGeom prst="rect">
+            <a:avLst/>
+          </a:prstGeom>
+          <a:noFill/>
+          <a:extLst>
+            <a:ext uri="{909E8E84-426E-40DD-AFC4-6F175D3DCCD1}">
+              <a14:hiddenFill xmlns:a14="http://schemas.microsoft.com/office/drawing/2010/main">
+                <a:solidFill>
+                  <a:srgbClr val="FFFFFF"/>
+                </a:solidFill>
+              </a14:hiddenFill>
+            </a:ext>
+          </a:extLst>
+        </p:spPr>
+      </p:pic>
       <p:sp>
         <p:nvSpPr>
           <p:cNvPr id="2" name="Text 0"/>
@@ -11826,7 +12469,7 @@
         </p:nvSpPr>
         <p:spPr>
           <a:xfrm>
-            <a:off x="7059168" y="2212848"/>
+            <a:off x="7059168" y="2180610"/>
             <a:ext cx="4343400" cy="457200"/>
           </a:xfrm>
           <a:prstGeom prst="rect">
@@ -11924,7 +12567,7 @@
         </p:nvSpPr>
         <p:spPr>
           <a:xfrm>
-            <a:off x="7059168" y="2779776"/>
+            <a:off x="7059168" y="2736225"/>
             <a:ext cx="4343400" cy="457200"/>
           </a:xfrm>
           <a:prstGeom prst="rect">
@@ -12022,7 +12665,7 @@
         </p:nvSpPr>
         <p:spPr>
           <a:xfrm>
-            <a:off x="7059168" y="3346704"/>
+            <a:off x="7059168" y="3319272"/>
             <a:ext cx="4343400" cy="457200"/>
           </a:xfrm>
           <a:prstGeom prst="rect">
@@ -12120,7 +12763,7 @@
         </p:nvSpPr>
         <p:spPr>
           <a:xfrm>
-            <a:off x="7059168" y="3913632"/>
+            <a:off x="7059168" y="3886200"/>
             <a:ext cx="4343400" cy="457200"/>
           </a:xfrm>
           <a:prstGeom prst="rect">
@@ -12218,7 +12861,7 @@
         </p:nvSpPr>
         <p:spPr>
           <a:xfrm>
-            <a:off x="7059168" y="4480560"/>
+            <a:off x="7059168" y="4442655"/>
             <a:ext cx="4343400" cy="457200"/>
           </a:xfrm>
           <a:prstGeom prst="rect">
